--- a/public/partners/jipange-mwangaza-partnership-deck.pptx
+++ b/public/partners/jipange-mwangaza-partnership-deck.pptx
@@ -1499,7 +1499,7 @@
                 <a:latin typeface="QuattrocentoSans"/>
                 <a:ea typeface="QuattrocentoSans"/>
               </a:rPr>
-              <a:t>Where does my money go? Which vehicle fits my life stage and goal? JiPange answers with 18 calculators and 6 goal planners built on Kenya's actual financial architecture. Its investment-returns and retirement tools surface government bonds — and hand the user directly to Mwangaza to act.</a:t>
+              <a:t>Where does my money go? Which vehicle fits my life stage and goal? JiPange answers with 25 calculators and 6 goal planners built on Kenya's actual financial architecture. Its investment-returns and retirement tools surface government bonds — and hand the user directly to Mwangaza to act.</a:t>
             </a:r>
             <a:endParaRPr lang="en-US" sz="1100" noProof="1"/>
           </a:p>
@@ -8626,7 +8626,7 @@
                 <a:latin typeface="QuattrocentoSans"/>
                 <a:ea typeface="QuattrocentoSans"/>
               </a:rPr>
-              <a:t>Live now — 18 calculators, 6 planners, a 90-second Pesa Picture. Free to explore today.</a:t>
+              <a:t>Live now — 25 calculators, 6 planners, a 90-second Pesa Picture. Free to explore today.</a:t>
             </a:r>
             <a:endParaRPr lang="en-US" sz="1600" noProof="1"/>
           </a:p>
@@ -8776,7 +8776,7 @@
                 <a:latin typeface="QuattrocentoSans"/>
                 <a:ea typeface="QuattrocentoSans"/>
               </a:rPr>
-              <a:t>JiPange × Mwangaza Yield — free, anonymous, built on official data. Partnership enquiries: partners@jipangefinance.org [placeholder — confirm address] · The conversation can begin now.</a:t>
+              <a:t>JiPange × Mwangaza Yield — free, anonymous, built on official data. Partnership enquiries: hello@jipangefinance.org · The conversation can begin now.</a:t>
             </a:r>
             <a:endParaRPr lang="en-US" sz="800" noProof="1"/>
           </a:p>
